--- a/data-eng/decks/w4d4s2.pptx
+++ b/data-eng/decks/w4d4s2.pptx
@@ -3099,7 +3099,7 @@
       <p:grpSpPr/>
       <p:sp>
         <p:nvSpPr>
-          <p:cNvPr id="2" name="Oval 1"/>
+          <p:cNvPr id="2" name="deckgen:decor"/>
           <p:cNvSpPr/>
           <p:nvPr/>
         </p:nvSpPr>
@@ -3129,7 +3129,7 @@
       </p:sp>
       <p:sp>
         <p:nvSpPr>
-          <p:cNvPr id="3" name="Oval 2"/>
+          <p:cNvPr id="3" name="deckgen:decor"/>
           <p:cNvSpPr/>
           <p:nvPr/>
         </p:nvSpPr>
@@ -3159,7 +3159,7 @@
       </p:sp>
       <p:sp>
         <p:nvSpPr>
-          <p:cNvPr id="4" name="Oval 3"/>
+          <p:cNvPr id="4" name="deckgen:decor"/>
           <p:cNvSpPr/>
           <p:nvPr/>
         </p:nvSpPr>
@@ -3189,7 +3189,7 @@
       </p:sp>
       <p:sp>
         <p:nvSpPr>
-          <p:cNvPr id="5" name="Rectangle 4"/>
+          <p:cNvPr id="5" name="deckgen:decor"/>
           <p:cNvSpPr/>
           <p:nvPr/>
         </p:nvSpPr>
@@ -3219,7 +3219,7 @@
       </p:sp>
       <p:sp>
         <p:nvSpPr>
-          <p:cNvPr id="6" name="Oval 5"/>
+          <p:cNvPr id="6" name="deckgen:decor"/>
           <p:cNvSpPr/>
           <p:nvPr/>
         </p:nvSpPr>
@@ -3249,7 +3249,7 @@
       </p:sp>
       <p:sp>
         <p:nvSpPr>
-          <p:cNvPr id="7" name="Oval 6"/>
+          <p:cNvPr id="7" name="deckgen:decor"/>
           <p:cNvSpPr/>
           <p:nvPr/>
         </p:nvSpPr>
@@ -3279,7 +3279,7 @@
       </p:sp>
       <p:sp>
         <p:nvSpPr>
-          <p:cNvPr id="8" name="Oval 7"/>
+          <p:cNvPr id="8" name="deckgen:decor"/>
           <p:cNvSpPr/>
           <p:nvPr/>
         </p:nvSpPr>
@@ -3309,7 +3309,7 @@
       </p:sp>
       <p:sp>
         <p:nvSpPr>
-          <p:cNvPr id="9" name="Oval 8"/>
+          <p:cNvPr id="9" name="deckgen:decor"/>
           <p:cNvSpPr/>
           <p:nvPr/>
         </p:nvSpPr>
@@ -3339,7 +3339,7 @@
       </p:sp>
       <p:sp>
         <p:nvSpPr>
-          <p:cNvPr id="10" name="Rectangle 9"/>
+          <p:cNvPr id="10" name="deckgen:decor"/>
           <p:cNvSpPr/>
           <p:nvPr/>
         </p:nvSpPr>
@@ -3617,7 +3617,7 @@
       <p:grpSpPr/>
       <p:sp>
         <p:nvSpPr>
-          <p:cNvPr id="2" name="Oval 1"/>
+          <p:cNvPr id="2" name="deckgen:decor"/>
           <p:cNvSpPr/>
           <p:nvPr/>
         </p:nvSpPr>
@@ -3647,7 +3647,7 @@
       </p:sp>
       <p:sp>
         <p:nvSpPr>
-          <p:cNvPr id="3" name="Oval 2"/>
+          <p:cNvPr id="3" name="deckgen:decor"/>
           <p:cNvSpPr/>
           <p:nvPr/>
         </p:nvSpPr>
@@ -4399,7 +4399,7 @@
                 <a:ea typeface="Pretendard"/>
                 <a:cs typeface="Pretendard"/>
               </a:rPr>
-              <a:t>Trino CLI 접속 상태 · cnt 6 확인</a:t>
+              <a:t>Trino CLI 접속 · 두 엔진 6 · 165000.0</a:t>
             </a:r>
           </a:p>
         </p:txBody>
@@ -4424,7 +4424,7 @@
       <p:grpSpPr/>
       <p:sp>
         <p:nvSpPr>
-          <p:cNvPr id="2" name="Oval 1"/>
+          <p:cNvPr id="2" name="deckgen:decor"/>
           <p:cNvSpPr/>
           <p:nvPr/>
         </p:nvSpPr>
@@ -4454,7 +4454,7 @@
       </p:sp>
       <p:sp>
         <p:nvSpPr>
-          <p:cNvPr id="3" name="Oval 2"/>
+          <p:cNvPr id="3" name="deckgen:decor"/>
           <p:cNvSpPr/>
           <p:nvPr/>
         </p:nvSpPr>
@@ -4484,7 +4484,7 @@
       </p:sp>
       <p:sp>
         <p:nvSpPr>
-          <p:cNvPr id="4" name="Oval 3"/>
+          <p:cNvPr id="4" name="deckgen:decor"/>
           <p:cNvSpPr/>
           <p:nvPr/>
         </p:nvSpPr>
@@ -4765,7 +4765,7 @@
                 <a:ea typeface="Pretendard"/>
                 <a:cs typeface="Pretendard"/>
               </a:rPr>
-              <a:t>catalog/iceberg.properties 를 쓰고 각 줄의 뜻을 말할 수 있다</a:t>
+              <a:t>히어독으로 iceberg.properties 를 쓰고 각 줄의 뜻을 말할 수 있다</a:t>
             </a:r>
           </a:p>
         </p:txBody>
@@ -4911,7 +4911,7 @@
                 <a:ea typeface="Pretendard"/>
                 <a:cs typeface="Pretendard"/>
               </a:rPr>
-              <a:t>trino 서비스를 compose 에 추가해 SERVER STARTED 까지 띄운다</a:t>
+              <a:t>trino:483 을 더한 compose 로 SERVER STARTED 까지 띄운다</a:t>
             </a:r>
           </a:p>
         </p:txBody>
@@ -5415,7 +5415,7 @@
       <p:grpSpPr/>
       <p:sp>
         <p:nvSpPr>
-          <p:cNvPr id="2" name="Oval 1"/>
+          <p:cNvPr id="2" name="deckgen:decor"/>
           <p:cNvSpPr/>
           <p:nvPr/>
         </p:nvSpPr>
@@ -5445,7 +5445,7 @@
       </p:sp>
       <p:sp>
         <p:nvSpPr>
-          <p:cNvPr id="3" name="Oval 2"/>
+          <p:cNvPr id="3" name="deckgen:decor"/>
           <p:cNvSpPr/>
           <p:nvPr/>
         </p:nvSpPr>
@@ -5475,7 +5475,7 @@
       </p:sp>
       <p:sp>
         <p:nvSpPr>
-          <p:cNvPr id="4" name="Oval 3"/>
+          <p:cNvPr id="4" name="deckgen:decor"/>
           <p:cNvSpPr/>
           <p:nvPr/>
         </p:nvSpPr>
@@ -5651,7 +5651,7 @@
                 <a:ea typeface="Pretendard"/>
                 <a:cs typeface="Pretendard"/>
               </a:rPr>
-              <a:t>4-3 까지의 컨테이너 4개가 떠 있는 상태에서 catalog 폴더를 새로 만들고 시작합니다</a:t>
+              <a:t>4-3 까지의 컨테이너 넷(orders 6행)이 떠 있는 상태에서 시작합니다</a:t>
             </a:r>
           </a:p>
         </p:txBody>
@@ -5797,7 +5797,7 @@
                 <a:ea typeface="Pretendard"/>
                 <a:cs typeface="Pretendard"/>
               </a:rPr>
-              <a:t>catalog/</a:t>
+              <a:t>히어독으로</a:t>
             </a:r>
           </a:p>
           <a:p>
@@ -5961,7 +5961,7 @@
                 <a:ea typeface="Pretendard"/>
                 <a:cs typeface="Pretendard"/>
               </a:rPr>
-              <a:t>compose 에 trino</a:t>
+              <a:t>compose 통째 교체</a:t>
             </a:r>
           </a:p>
           <a:p>
@@ -5979,7 +5979,7 @@
                 <a:ea typeface="Pretendard"/>
                 <a:cs typeface="Pretendard"/>
               </a:rPr>
-              <a:t>up -d trino</a:t>
+              <a:t>up -d · until</a:t>
             </a:r>
           </a:p>
         </p:txBody>
@@ -6125,7 +6125,7 @@
                 <a:ea typeface="Pretendard"/>
                 <a:cs typeface="Pretendard"/>
               </a:rPr>
-              <a:t>ls · cat</a:t>
+              <a:t>ls · logs</a:t>
             </a:r>
           </a:p>
           <a:p>
@@ -6143,7 +6143,7 @@
                 <a:ea typeface="Pretendard"/>
                 <a:cs typeface="Pretendard"/>
               </a:rPr>
-              <a:t>logs | grep</a:t>
+              <a:t>grep Added catalog</a:t>
             </a:r>
           </a:p>
         </p:txBody>
@@ -6608,7 +6608,7 @@
       <p:grpSpPr/>
       <p:sp>
         <p:nvSpPr>
-          <p:cNvPr id="2" name="Oval 1"/>
+          <p:cNvPr id="2" name="deckgen:decor"/>
           <p:cNvSpPr/>
           <p:nvPr/>
         </p:nvSpPr>
@@ -6638,7 +6638,7 @@
       </p:sp>
       <p:sp>
         <p:nvSpPr>
-          <p:cNvPr id="3" name="Oval 2"/>
+          <p:cNvPr id="3" name="deckgen:decor"/>
           <p:cNvSpPr/>
           <p:nvPr/>
         </p:nvSpPr>
@@ -6668,7 +6668,7 @@
       </p:sp>
       <p:sp>
         <p:nvSpPr>
-          <p:cNvPr id="4" name="Oval 3"/>
+          <p:cNvPr id="4" name="deckgen:decor"/>
           <p:cNvSpPr/>
           <p:nvPr/>
         </p:nvSpPr>
@@ -6773,7 +6773,7 @@
                 <a:ea typeface="Pretendard"/>
                 <a:cs typeface="Pretendard"/>
               </a:rPr>
-              <a:t>iceberg.properties — 여섯 줄의 뜻</a:t>
+              <a:t>iceberg.properties — 핵심 일곱 줄</a:t>
             </a:r>
           </a:p>
         </p:txBody>
@@ -6959,11 +6959,11 @@
         <p:spPr>
           <a:xfrm>
             <a:off x="1143000" y="3448050"/>
-            <a:ext cx="7002780" cy="546100"/>
+            <a:ext cx="7002780" cy="457200"/>
           </a:xfrm>
           <a:prstGeom prst="roundRect">
             <a:avLst>
-              <a:gd name="adj" fmla="val 6976"/>
+              <a:gd name="adj" fmla="val 8333"/>
             </a:avLst>
           </a:prstGeom>
           <a:solidFill>
@@ -6993,7 +6993,7 @@
         <p:spPr>
           <a:xfrm>
             <a:off x="1238250" y="3448050"/>
-            <a:ext cx="6812280" cy="546100"/>
+            <a:ext cx="6812280" cy="457200"/>
           </a:xfrm>
           <a:prstGeom prst="rect">
             <a:avLst/>
@@ -7034,11 +7034,11 @@
         <p:spPr>
           <a:xfrm>
             <a:off x="8183880" y="3448050"/>
-            <a:ext cx="8961120" cy="546100"/>
+            <a:ext cx="8961120" cy="457200"/>
           </a:xfrm>
           <a:prstGeom prst="roundRect">
             <a:avLst>
-              <a:gd name="adj" fmla="val 6976"/>
+              <a:gd name="adj" fmla="val 8333"/>
             </a:avLst>
           </a:prstGeom>
           <a:solidFill>
@@ -7068,7 +7068,7 @@
         <p:spPr>
           <a:xfrm>
             <a:off x="8279130" y="3448050"/>
-            <a:ext cx="8770620" cy="546100"/>
+            <a:ext cx="8770620" cy="457200"/>
           </a:xfrm>
           <a:prstGeom prst="rect">
             <a:avLst/>
@@ -7108,12 +7108,12 @@
         </p:nvSpPr>
         <p:spPr>
           <a:xfrm>
-            <a:off x="1143000" y="4070350"/>
-            <a:ext cx="7002780" cy="546100"/>
+            <a:off x="1143000" y="3981450"/>
+            <a:ext cx="7002780" cy="457200"/>
           </a:xfrm>
           <a:prstGeom prst="roundRect">
             <a:avLst>
-              <a:gd name="adj" fmla="val 6976"/>
+              <a:gd name="adj" fmla="val 8333"/>
             </a:avLst>
           </a:prstGeom>
           <a:solidFill>
@@ -7142,8 +7142,8 @@
         </p:nvSpPr>
         <p:spPr>
           <a:xfrm>
-            <a:off x="1238250" y="4070350"/>
-            <a:ext cx="6812280" cy="546100"/>
+            <a:off x="1238250" y="3981450"/>
+            <a:ext cx="6812280" cy="457200"/>
           </a:xfrm>
           <a:prstGeom prst="rect">
             <a:avLst/>
@@ -7183,12 +7183,12 @@
         </p:nvSpPr>
         <p:spPr>
           <a:xfrm>
-            <a:off x="8183880" y="4070350"/>
-            <a:ext cx="8961120" cy="546100"/>
+            <a:off x="8183880" y="3981450"/>
+            <a:ext cx="8961120" cy="457200"/>
           </a:xfrm>
           <a:prstGeom prst="roundRect">
             <a:avLst>
-              <a:gd name="adj" fmla="val 6976"/>
+              <a:gd name="adj" fmla="val 8333"/>
             </a:avLst>
           </a:prstGeom>
           <a:solidFill>
@@ -7217,8 +7217,8 @@
         </p:nvSpPr>
         <p:spPr>
           <a:xfrm>
-            <a:off x="8279130" y="4070350"/>
-            <a:ext cx="8770620" cy="546100"/>
+            <a:off x="8279130" y="3981450"/>
+            <a:ext cx="8770620" cy="457200"/>
           </a:xfrm>
           <a:prstGeom prst="rect">
             <a:avLst/>
@@ -7258,12 +7258,12 @@
         </p:nvSpPr>
         <p:spPr>
           <a:xfrm>
-            <a:off x="1143000" y="4692650"/>
-            <a:ext cx="7002780" cy="546100"/>
+            <a:off x="1143000" y="4514850"/>
+            <a:ext cx="7002780" cy="457200"/>
           </a:xfrm>
           <a:prstGeom prst="roundRect">
             <a:avLst>
-              <a:gd name="adj" fmla="val 6976"/>
+              <a:gd name="adj" fmla="val 8333"/>
             </a:avLst>
           </a:prstGeom>
           <a:solidFill>
@@ -7292,8 +7292,8 @@
         </p:nvSpPr>
         <p:spPr>
           <a:xfrm>
-            <a:off x="1238250" y="4692650"/>
-            <a:ext cx="6812280" cy="546100"/>
+            <a:off x="1238250" y="4514850"/>
+            <a:ext cx="6812280" cy="457200"/>
           </a:xfrm>
           <a:prstGeom prst="rect">
             <a:avLst/>
@@ -7333,12 +7333,12 @@
         </p:nvSpPr>
         <p:spPr>
           <a:xfrm>
-            <a:off x="8183880" y="4692650"/>
-            <a:ext cx="8961120" cy="546100"/>
+            <a:off x="8183880" y="4514850"/>
+            <a:ext cx="8961120" cy="457200"/>
           </a:xfrm>
           <a:prstGeom prst="roundRect">
             <a:avLst>
-              <a:gd name="adj" fmla="val 6976"/>
+              <a:gd name="adj" fmla="val 8333"/>
             </a:avLst>
           </a:prstGeom>
           <a:solidFill>
@@ -7367,8 +7367,8 @@
         </p:nvSpPr>
         <p:spPr>
           <a:xfrm>
-            <a:off x="8279130" y="4692650"/>
-            <a:ext cx="8770620" cy="546100"/>
+            <a:off x="8279130" y="4514850"/>
+            <a:ext cx="8770620" cy="457200"/>
           </a:xfrm>
           <a:prstGeom prst="rect">
             <a:avLst/>
@@ -7408,12 +7408,12 @@
         </p:nvSpPr>
         <p:spPr>
           <a:xfrm>
-            <a:off x="1143000" y="5314950"/>
-            <a:ext cx="7002780" cy="546100"/>
+            <a:off x="1143000" y="5048250"/>
+            <a:ext cx="7002780" cy="457200"/>
           </a:xfrm>
           <a:prstGeom prst="roundRect">
             <a:avLst>
-              <a:gd name="adj" fmla="val 6976"/>
+              <a:gd name="adj" fmla="val 8333"/>
             </a:avLst>
           </a:prstGeom>
           <a:solidFill>
@@ -7442,8 +7442,8 @@
         </p:nvSpPr>
         <p:spPr>
           <a:xfrm>
-            <a:off x="1238250" y="5314950"/>
-            <a:ext cx="6812280" cy="546100"/>
+            <a:off x="1238250" y="5048250"/>
+            <a:ext cx="6812280" cy="457200"/>
           </a:xfrm>
           <a:prstGeom prst="rect">
             <a:avLst/>
@@ -7483,12 +7483,12 @@
         </p:nvSpPr>
         <p:spPr>
           <a:xfrm>
-            <a:off x="8183880" y="5314950"/>
-            <a:ext cx="8961120" cy="546100"/>
+            <a:off x="8183880" y="5048250"/>
+            <a:ext cx="8961120" cy="457200"/>
           </a:xfrm>
           <a:prstGeom prst="roundRect">
             <a:avLst>
-              <a:gd name="adj" fmla="val 6976"/>
+              <a:gd name="adj" fmla="val 8333"/>
             </a:avLst>
           </a:prstGeom>
           <a:solidFill>
@@ -7517,8 +7517,8 @@
         </p:nvSpPr>
         <p:spPr>
           <a:xfrm>
-            <a:off x="8279130" y="5314950"/>
-            <a:ext cx="8770620" cy="546100"/>
+            <a:off x="8279130" y="5048250"/>
+            <a:ext cx="8770620" cy="457200"/>
           </a:xfrm>
           <a:prstGeom prst="rect">
             <a:avLst/>
@@ -7558,12 +7558,12 @@
         </p:nvSpPr>
         <p:spPr>
           <a:xfrm>
-            <a:off x="1143000" y="5937250"/>
-            <a:ext cx="7002780" cy="546100"/>
+            <a:off x="1143000" y="5581650"/>
+            <a:ext cx="7002780" cy="457200"/>
           </a:xfrm>
           <a:prstGeom prst="roundRect">
             <a:avLst>
-              <a:gd name="adj" fmla="val 6976"/>
+              <a:gd name="adj" fmla="val 8333"/>
             </a:avLst>
           </a:prstGeom>
           <a:solidFill>
@@ -7592,8 +7592,8 @@
         </p:nvSpPr>
         <p:spPr>
           <a:xfrm>
-            <a:off x="1238250" y="5937250"/>
-            <a:ext cx="6812280" cy="546100"/>
+            <a:off x="1238250" y="5581650"/>
+            <a:ext cx="6812280" cy="457200"/>
           </a:xfrm>
           <a:prstGeom prst="rect">
             <a:avLst/>
@@ -7620,7 +7620,7 @@
                 <a:ea typeface="Pretendard"/>
                 <a:cs typeface="Pretendard"/>
               </a:rPr>
-              <a:t>s3.endpoint</a:t>
+              <a:t>fs.s3.enabled=true</a:t>
             </a:r>
           </a:p>
         </p:txBody>
@@ -7633,12 +7633,12 @@
         </p:nvSpPr>
         <p:spPr>
           <a:xfrm>
-            <a:off x="8183880" y="5937250"/>
-            <a:ext cx="8961120" cy="546100"/>
+            <a:off x="8183880" y="5581650"/>
+            <a:ext cx="8961120" cy="457200"/>
           </a:xfrm>
           <a:prstGeom prst="roundRect">
             <a:avLst>
-              <a:gd name="adj" fmla="val 6976"/>
+              <a:gd name="adj" fmla="val 8333"/>
             </a:avLst>
           </a:prstGeom>
           <a:solidFill>
@@ -7667,8 +7667,8 @@
         </p:nvSpPr>
         <p:spPr>
           <a:xfrm>
-            <a:off x="8279130" y="5937250"/>
-            <a:ext cx="8770620" cy="546100"/>
+            <a:off x="8279130" y="5581650"/>
+            <a:ext cx="8770620" cy="457200"/>
           </a:xfrm>
           <a:prstGeom prst="rect">
             <a:avLst/>
@@ -7695,7 +7695,7 @@
                 <a:ea typeface="Pretendard"/>
                 <a:cs typeface="Pretendard"/>
               </a:rPr>
-              <a:t>S3 주소 — 컨테이너 minio</a:t>
+              <a:t>S3 를 내장 방식으로 읽는 스위치</a:t>
             </a:r>
           </a:p>
         </p:txBody>
@@ -7708,12 +7708,12 @@
         </p:nvSpPr>
         <p:spPr>
           <a:xfrm>
-            <a:off x="1143000" y="6559550"/>
-            <a:ext cx="7002780" cy="546100"/>
+            <a:off x="1143000" y="6115050"/>
+            <a:ext cx="7002780" cy="457200"/>
           </a:xfrm>
           <a:prstGeom prst="roundRect">
             <a:avLst>
-              <a:gd name="adj" fmla="val 6976"/>
+              <a:gd name="adj" fmla="val 8333"/>
             </a:avLst>
           </a:prstGeom>
           <a:solidFill>
@@ -7742,8 +7742,8 @@
         </p:nvSpPr>
         <p:spPr>
           <a:xfrm>
-            <a:off x="1238250" y="6559550"/>
-            <a:ext cx="6812280" cy="546100"/>
+            <a:off x="1238250" y="6115050"/>
+            <a:ext cx="6812280" cy="457200"/>
           </a:xfrm>
           <a:prstGeom prst="rect">
             <a:avLst/>
@@ -7770,7 +7770,7 @@
                 <a:ea typeface="Pretendard"/>
                 <a:cs typeface="Pretendard"/>
               </a:rPr>
-              <a:t>s3.path-style-access=true</a:t>
+              <a:t>s3.endpoint</a:t>
             </a:r>
           </a:p>
         </p:txBody>
@@ -7783,12 +7783,12 @@
         </p:nvSpPr>
         <p:spPr>
           <a:xfrm>
-            <a:off x="8183880" y="6559550"/>
-            <a:ext cx="8961120" cy="546100"/>
+            <a:off x="8183880" y="6115050"/>
+            <a:ext cx="8961120" cy="457200"/>
           </a:xfrm>
           <a:prstGeom prst="roundRect">
             <a:avLst>
-              <a:gd name="adj" fmla="val 6976"/>
+              <a:gd name="adj" fmla="val 8333"/>
             </a:avLst>
           </a:prstGeom>
           <a:solidFill>
@@ -7817,8 +7817,8 @@
         </p:nvSpPr>
         <p:spPr>
           <a:xfrm>
-            <a:off x="8279130" y="6559550"/>
-            <a:ext cx="8770620" cy="546100"/>
+            <a:off x="8279130" y="6115050"/>
+            <a:ext cx="8770620" cy="457200"/>
           </a:xfrm>
           <a:prstGeom prst="rect">
             <a:avLst/>
@@ -7845,6 +7845,156 @@
                 <a:ea typeface="Pretendard"/>
                 <a:cs typeface="Pretendard"/>
               </a:rPr>
+              <a:t>S3 주소 — 컨테이너 minio</a:t>
+            </a:r>
+          </a:p>
+        </p:txBody>
+      </p:sp>
+      <p:sp>
+        <p:nvSpPr>
+          <p:cNvPr id="36" name="Rounded Rectangle 35"/>
+          <p:cNvSpPr/>
+          <p:nvPr/>
+        </p:nvSpPr>
+        <p:spPr>
+          <a:xfrm>
+            <a:off x="1143000" y="6648450"/>
+            <a:ext cx="7002780" cy="457200"/>
+          </a:xfrm>
+          <a:prstGeom prst="roundRect">
+            <a:avLst>
+              <a:gd name="adj" fmla="val 8333"/>
+            </a:avLst>
+          </a:prstGeom>
+          <a:solidFill>
+            <a:srgbClr val="EDF3FD"/>
+          </a:solidFill>
+          <a:ln w="9525">
+            <a:solidFill>
+              <a:srgbClr val="BFD3F5"/>
+            </a:solidFill>
+          </a:ln>
+          <a:effectLst/>
+        </p:spPr>
+        <p:txBody>
+          <a:bodyPr rtlCol="0" anchor="ctr" wrap="square"/>
+          <a:lstStyle/>
+          <a:p>
+            <a:pPr algn="ctr"/>
+          </a:p>
+        </p:txBody>
+      </p:sp>
+      <p:sp>
+        <p:nvSpPr>
+          <p:cNvPr id="37" name="TextBox 36"/>
+          <p:cNvSpPr txBox="1"/>
+          <p:nvPr/>
+        </p:nvSpPr>
+        <p:spPr>
+          <a:xfrm>
+            <a:off x="1238250" y="6648450"/>
+            <a:ext cx="6812280" cy="457200"/>
+          </a:xfrm>
+          <a:prstGeom prst="rect">
+            <a:avLst/>
+          </a:prstGeom>
+          <a:noFill/>
+        </p:spPr>
+        <p:txBody>
+          <a:bodyPr wrap="square" lIns="0" rIns="0" tIns="0" bIns="0" anchor="ctr">
+            <a:spAutoFit/>
+          </a:bodyPr>
+          <a:lstStyle/>
+          <a:p>
+            <a:pPr algn="l">
+              <a:lnSpc>
+                <a:spcPct val="115000"/>
+              </a:lnSpc>
+            </a:pPr>
+            <a:r>
+              <a:rPr sz="1875" b="1">
+                <a:solidFill>
+                  <a:srgbClr val="0D2B5E"/>
+                </a:solidFill>
+                <a:latin typeface="Pretendard"/>
+                <a:ea typeface="Pretendard"/>
+                <a:cs typeface="Pretendard"/>
+              </a:rPr>
+              <a:t>s3.path-style-access=true</a:t>
+            </a:r>
+          </a:p>
+        </p:txBody>
+      </p:sp>
+      <p:sp>
+        <p:nvSpPr>
+          <p:cNvPr id="38" name="Rounded Rectangle 37"/>
+          <p:cNvSpPr/>
+          <p:nvPr/>
+        </p:nvSpPr>
+        <p:spPr>
+          <a:xfrm>
+            <a:off x="8183880" y="6648450"/>
+            <a:ext cx="8961120" cy="457200"/>
+          </a:xfrm>
+          <a:prstGeom prst="roundRect">
+            <a:avLst>
+              <a:gd name="adj" fmla="val 8333"/>
+            </a:avLst>
+          </a:prstGeom>
+          <a:solidFill>
+            <a:srgbClr val="FAFBFD"/>
+          </a:solidFill>
+          <a:ln w="9525">
+            <a:solidFill>
+              <a:srgbClr val="DCE1E8"/>
+            </a:solidFill>
+          </a:ln>
+          <a:effectLst/>
+        </p:spPr>
+        <p:txBody>
+          <a:bodyPr rtlCol="0" anchor="ctr" wrap="square"/>
+          <a:lstStyle/>
+          <a:p>
+            <a:pPr algn="ctr"/>
+          </a:p>
+        </p:txBody>
+      </p:sp>
+      <p:sp>
+        <p:nvSpPr>
+          <p:cNvPr id="39" name="TextBox 38"/>
+          <p:cNvSpPr txBox="1"/>
+          <p:nvPr/>
+        </p:nvSpPr>
+        <p:spPr>
+          <a:xfrm>
+            <a:off x="8279130" y="6648450"/>
+            <a:ext cx="8770620" cy="457200"/>
+          </a:xfrm>
+          <a:prstGeom prst="rect">
+            <a:avLst/>
+          </a:prstGeom>
+          <a:noFill/>
+        </p:spPr>
+        <p:txBody>
+          <a:bodyPr wrap="square" lIns="0" rIns="0" tIns="0" bIns="0" anchor="ctr">
+            <a:spAutoFit/>
+          </a:bodyPr>
+          <a:lstStyle/>
+          <a:p>
+            <a:pPr algn="ctr">
+              <a:lnSpc>
+                <a:spcPct val="115000"/>
+              </a:lnSpc>
+            </a:pPr>
+            <a:r>
+              <a:rPr sz="1875" b="0">
+                <a:solidFill>
+                  <a:srgbClr val="3D3D3D"/>
+                </a:solidFill>
+                <a:latin typeface="Pretendard"/>
+                <a:ea typeface="Pretendard"/>
+                <a:cs typeface="Pretendard"/>
+              </a:rPr>
               <a:t>MinIO 는 true 여야 한다</a:t>
             </a:r>
           </a:p>
@@ -7852,7 +8002,7 @@
       </p:sp>
       <p:sp>
         <p:nvSpPr>
-          <p:cNvPr id="36" name="TextBox 35"/>
+          <p:cNvPr id="40" name="TextBox 39"/>
           <p:cNvSpPr txBox="1"/>
           <p:nvPr/>
         </p:nvSpPr>
@@ -7886,14 +8036,14 @@
                 <a:ea typeface="Pretendard"/>
                 <a:cs typeface="Pretendard"/>
               </a:rPr>
-              <a:t>표의 키는 iceberg. 접두사를 줄였다 — 전문 열 줄(minioadmin 자격증명 2줄·s3.region 포함)은 사이트 본문</a:t>
-            </a:r>
-          </a:p>
-        </p:txBody>
-      </p:sp>
-      <p:sp>
-        <p:nvSpPr>
-          <p:cNvPr id="37" name="TextBox 36"/>
+              <a:t>전문 열 줄은 사이트 본문의 히어독 한 상자로. 줄 끝 # 주석은 값으로 읽히니 붙이지 않는다</a:t>
+            </a:r>
+          </a:p>
+        </p:txBody>
+      </p:sp>
+      <p:sp>
+        <p:nvSpPr>
+          <p:cNvPr id="41" name="TextBox 40"/>
           <p:cNvSpPr txBox="1"/>
           <p:nvPr/>
         </p:nvSpPr>
@@ -7934,7 +8084,7 @@
       </p:sp>
       <p:sp>
         <p:nvSpPr>
-          <p:cNvPr id="38" name="Rectangle 37"/>
+          <p:cNvPr id="42" name="Rectangle 41"/>
           <p:cNvSpPr/>
           <p:nvPr/>
         </p:nvSpPr>
@@ -7964,7 +8114,7 @@
       </p:sp>
       <p:sp>
         <p:nvSpPr>
-          <p:cNvPr id="39" name="TextBox 38"/>
+          <p:cNvPr id="43" name="TextBox 42"/>
           <p:cNvSpPr txBox="1"/>
           <p:nvPr/>
         </p:nvSpPr>
@@ -8005,7 +8155,7 @@
       </p:sp>
       <p:sp>
         <p:nvSpPr>
-          <p:cNvPr id="40" name="TextBox 39"/>
+          <p:cNvPr id="44" name="TextBox 43"/>
           <p:cNvSpPr txBox="1"/>
           <p:nvPr/>
         </p:nvSpPr>
@@ -8064,7 +8214,7 @@
       <p:grpSpPr/>
       <p:sp>
         <p:nvSpPr>
-          <p:cNvPr id="2" name="Oval 1"/>
+          <p:cNvPr id="2" name="deckgen:decor"/>
           <p:cNvSpPr/>
           <p:nvPr/>
         </p:nvSpPr>
@@ -8094,7 +8244,7 @@
       </p:sp>
       <p:sp>
         <p:nvSpPr>
-          <p:cNvPr id="3" name="Oval 2"/>
+          <p:cNvPr id="3" name="deckgen:decor"/>
           <p:cNvSpPr/>
           <p:nvPr/>
         </p:nvSpPr>
@@ -8124,7 +8274,7 @@
       </p:sp>
       <p:sp>
         <p:nvSpPr>
-          <p:cNvPr id="4" name="Oval 3"/>
+          <p:cNvPr id="4" name="deckgen:decor"/>
           <p:cNvSpPr/>
           <p:nvPr/>
         </p:nvSpPr>
@@ -8229,7 +8379,7 @@
                 <a:ea typeface="Pretendard"/>
                 <a:cs typeface="Pretendard"/>
               </a:rPr>
-              <a:t>trino 서비스 추가와 기동</a:t>
+              <a:t>compose 를 바꾸고 trino 띄우기</a:t>
             </a:r>
           </a:p>
         </p:txBody>
@@ -8273,7 +8423,7 @@
         <p:spPr>
           <a:xfrm>
             <a:off x="1143000" y="2781300"/>
-            <a:ext cx="1783687" cy="571500"/>
+            <a:ext cx="1335881" cy="571500"/>
           </a:xfrm>
           <a:prstGeom prst="rect">
             <a:avLst/>
@@ -8303,7 +8453,7 @@
         <p:spPr>
           <a:xfrm>
             <a:off x="1143000" y="2781300"/>
-            <a:ext cx="1783687" cy="571500"/>
+            <a:ext cx="1335881" cy="571500"/>
           </a:xfrm>
           <a:prstGeom prst="rect">
             <a:avLst/>
@@ -8330,7 +8480,7 @@
                 <a:ea typeface="Pretendard"/>
                 <a:cs typeface="Pretendard"/>
               </a:rPr>
-              <a:t>compose 추가</a:t>
+              <a:t>compose</a:t>
             </a:r>
           </a:p>
         </p:txBody>
@@ -8343,8 +8493,8 @@
         </p:nvSpPr>
         <p:spPr>
           <a:xfrm>
-            <a:off x="2926687" y="2781300"/>
-            <a:ext cx="14218313" cy="571500"/>
+            <a:off x="2478881" y="2781300"/>
+            <a:ext cx="14666119" cy="571500"/>
           </a:xfrm>
           <a:prstGeom prst="rect">
             <a:avLst/>
@@ -8375,8 +8525,8 @@
         </p:nvSpPr>
         <p:spPr>
           <a:xfrm>
-            <a:off x="3079087" y="2781300"/>
-            <a:ext cx="13913513" cy="571500"/>
+            <a:off x="2631281" y="2781300"/>
+            <a:ext cx="14361319" cy="571500"/>
           </a:xfrm>
           <a:prstGeom prst="rect">
             <a:avLst/>
@@ -8403,7 +8553,7 @@
                 <a:ea typeface="Pretendard"/>
                 <a:cs typeface="Pretendard"/>
               </a:rPr>
-              <a:t>image: trinodb/trino · ports "8080:8080"</a:t>
+              <a:t>4-2 판 통째 교체 + trino 서비스 하나</a:t>
             </a:r>
           </a:p>
         </p:txBody>
@@ -8417,7 +8567,7 @@
         <p:spPr>
           <a:xfrm>
             <a:off x="1143000" y="3429000"/>
-            <a:ext cx="1783687" cy="571500"/>
+            <a:ext cx="1335881" cy="571500"/>
           </a:xfrm>
           <a:prstGeom prst="rect">
             <a:avLst/>
@@ -8447,7 +8597,7 @@
         <p:spPr>
           <a:xfrm>
             <a:off x="1143000" y="3429000"/>
-            <a:ext cx="1783687" cy="571500"/>
+            <a:ext cx="1335881" cy="571500"/>
           </a:xfrm>
           <a:prstGeom prst="rect">
             <a:avLst/>
@@ -8474,7 +8624,7 @@
                 <a:ea typeface="Pretendard"/>
                 <a:cs typeface="Pretendard"/>
               </a:rPr>
-              <a:t>볼륨</a:t>
+              <a:t>trino</a:t>
             </a:r>
           </a:p>
         </p:txBody>
@@ -8487,8 +8637,8 @@
         </p:nvSpPr>
         <p:spPr>
           <a:xfrm>
-            <a:off x="2926687" y="3429000"/>
-            <a:ext cx="14218313" cy="571500"/>
+            <a:off x="2478881" y="3429000"/>
+            <a:ext cx="14666119" cy="571500"/>
           </a:xfrm>
           <a:prstGeom prst="rect">
             <a:avLst/>
@@ -8519,8 +8669,8 @@
         </p:nvSpPr>
         <p:spPr>
           <a:xfrm>
-            <a:off x="3079087" y="3429000"/>
-            <a:ext cx="13913513" cy="571500"/>
+            <a:off x="2631281" y="3429000"/>
+            <a:ext cx="14361319" cy="571500"/>
           </a:xfrm>
           <a:prstGeom prst="rect">
             <a:avLst/>
@@ -8547,7 +8697,7 @@
                 <a:ea typeface="Pretendard"/>
                 <a:cs typeface="Pretendard"/>
               </a:rPr>
-              <a:t>./catalog:/etc/trino/catalog</a:t>
+              <a:t>image: trinodb/trino:483 · ports "8080:8080"</a:t>
             </a:r>
           </a:p>
         </p:txBody>
@@ -8561,7 +8711,7 @@
         <p:spPr>
           <a:xfrm>
             <a:off x="1143000" y="4076700"/>
-            <a:ext cx="1783687" cy="571500"/>
+            <a:ext cx="1335881" cy="571500"/>
           </a:xfrm>
           <a:prstGeom prst="rect">
             <a:avLst/>
@@ -8591,7 +8741,7 @@
         <p:spPr>
           <a:xfrm>
             <a:off x="1143000" y="4076700"/>
-            <a:ext cx="1783687" cy="571500"/>
+            <a:ext cx="1335881" cy="571500"/>
           </a:xfrm>
           <a:prstGeom prst="rect">
             <a:avLst/>
@@ -8618,7 +8768,7 @@
                 <a:ea typeface="Pretendard"/>
                 <a:cs typeface="Pretendard"/>
               </a:rPr>
-              <a:t>폴더·기동</a:t>
+              <a:t>볼륨</a:t>
             </a:r>
           </a:p>
         </p:txBody>
@@ -8631,8 +8781,8 @@
         </p:nvSpPr>
         <p:spPr>
           <a:xfrm>
-            <a:off x="2926687" y="4076700"/>
-            <a:ext cx="14218313" cy="571500"/>
+            <a:off x="2478881" y="4076700"/>
+            <a:ext cx="14666119" cy="571500"/>
           </a:xfrm>
           <a:prstGeom prst="rect">
             <a:avLst/>
@@ -8663,8 +8813,8 @@
         </p:nvSpPr>
         <p:spPr>
           <a:xfrm>
-            <a:off x="3079087" y="4076700"/>
-            <a:ext cx="13913513" cy="571500"/>
+            <a:off x="2631281" y="4076700"/>
+            <a:ext cx="14361319" cy="571500"/>
           </a:xfrm>
           <a:prstGeom prst="rect">
             <a:avLst/>
@@ -8691,7 +8841,7 @@
                 <a:ea typeface="Pretendard"/>
                 <a:cs typeface="Pretendard"/>
               </a:rPr>
-              <a:t>mkdir -p catalog → docker compose up -d trino</a:t>
+              <a:t>./catalog:/etc/trino/catalog</a:t>
             </a:r>
           </a:p>
         </p:txBody>
@@ -8705,7 +8855,7 @@
         <p:spPr>
           <a:xfrm>
             <a:off x="1143000" y="4724400"/>
-            <a:ext cx="1783687" cy="571500"/>
+            <a:ext cx="1335881" cy="571500"/>
           </a:xfrm>
           <a:prstGeom prst="rect">
             <a:avLst/>
@@ -8735,7 +8885,7 @@
         <p:spPr>
           <a:xfrm>
             <a:off x="1143000" y="4724400"/>
-            <a:ext cx="1783687" cy="571500"/>
+            <a:ext cx="1335881" cy="571500"/>
           </a:xfrm>
           <a:prstGeom prst="rect">
             <a:avLst/>
@@ -8762,7 +8912,7 @@
                 <a:ea typeface="Pretendard"/>
                 <a:cs typeface="Pretendard"/>
               </a:rPr>
-              <a:t>로그 대기</a:t>
+              <a:t>기동</a:t>
             </a:r>
           </a:p>
         </p:txBody>
@@ -8775,8 +8925,8 @@
         </p:nvSpPr>
         <p:spPr>
           <a:xfrm>
-            <a:off x="2926687" y="4724400"/>
-            <a:ext cx="14218313" cy="571500"/>
+            <a:off x="2478881" y="4724400"/>
+            <a:ext cx="14666119" cy="571500"/>
           </a:xfrm>
           <a:prstGeom prst="rect">
             <a:avLst/>
@@ -8807,8 +8957,8 @@
         </p:nvSpPr>
         <p:spPr>
           <a:xfrm>
-            <a:off x="3079087" y="4724400"/>
-            <a:ext cx="13913513" cy="571500"/>
+            <a:off x="2631281" y="4724400"/>
+            <a:ext cx="14361319" cy="571500"/>
           </a:xfrm>
           <a:prstGeom prst="rect">
             <a:avLst/>
@@ -8835,7 +8985,7 @@
                 <a:ea typeface="Pretendard"/>
                 <a:cs typeface="Pretendard"/>
               </a:rPr>
-              <a:t>docker compose logs -f trino → SERVER STARTED</a:t>
+              <a:t>docker compose up -d → trino 만 Started</a:t>
             </a:r>
           </a:p>
         </p:txBody>
@@ -8849,7 +8999,7 @@
         <p:spPr>
           <a:xfrm>
             <a:off x="1143000" y="5372100"/>
-            <a:ext cx="1783687" cy="571500"/>
+            <a:ext cx="1335881" cy="571500"/>
           </a:xfrm>
           <a:prstGeom prst="rect">
             <a:avLst/>
@@ -8879,7 +9029,7 @@
         <p:spPr>
           <a:xfrm>
             <a:off x="1143000" y="5372100"/>
-            <a:ext cx="1783687" cy="571500"/>
+            <a:ext cx="1335881" cy="571500"/>
           </a:xfrm>
           <a:prstGeom prst="rect">
             <a:avLst/>
@@ -8906,7 +9056,7 @@
                 <a:ea typeface="Pretendard"/>
                 <a:cs typeface="Pretendard"/>
               </a:rPr>
-              <a:t>웹 UI</a:t>
+              <a:t>대기</a:t>
             </a:r>
           </a:p>
         </p:txBody>
@@ -8919,8 +9069,8 @@
         </p:nvSpPr>
         <p:spPr>
           <a:xfrm>
-            <a:off x="2926687" y="5372100"/>
-            <a:ext cx="14218313" cy="571500"/>
+            <a:off x="2478881" y="5372100"/>
+            <a:ext cx="14666119" cy="571500"/>
           </a:xfrm>
           <a:prstGeom prst="rect">
             <a:avLst/>
@@ -8951,8 +9101,8 @@
         </p:nvSpPr>
         <p:spPr>
           <a:xfrm>
-            <a:off x="3079087" y="5372100"/>
-            <a:ext cx="13913513" cy="571500"/>
+            <a:off x="2631281" y="5372100"/>
+            <a:ext cx="14361319" cy="571500"/>
           </a:xfrm>
           <a:prstGeom prst="rect">
             <a:avLst/>
@@ -8979,68 +9129,27 @@
                 <a:ea typeface="Pretendard"/>
                 <a:cs typeface="Pretendard"/>
               </a:rPr>
-              <a:t>http://localhost:8080 (사용자 이름은 아무 값)</a:t>
-            </a:r>
-          </a:p>
-        </p:txBody>
-      </p:sp>
-      <p:sp>
-        <p:nvSpPr>
-          <p:cNvPr id="28" name="TextBox 27"/>
-          <p:cNvSpPr txBox="1"/>
-          <p:nvPr/>
-        </p:nvSpPr>
-        <p:spPr>
-          <a:xfrm>
-            <a:off x="1143000" y="7620000"/>
-            <a:ext cx="16002000" cy="342900"/>
-          </a:xfrm>
-          <a:prstGeom prst="rect">
-            <a:avLst/>
-          </a:prstGeom>
-          <a:noFill/>
-        </p:spPr>
-        <p:txBody>
-          <a:bodyPr wrap="square" lIns="0" rIns="0" tIns="0" bIns="0" anchor="t">
-            <a:spAutoFit/>
-          </a:bodyPr>
-          <a:lstStyle/>
-          <a:p>
-            <a:pPr algn="l">
-              <a:lnSpc>
-                <a:spcPct val="100000"/>
-              </a:lnSpc>
-            </a:pPr>
-            <a:r>
-              <a:rPr sz="1875" b="1">
-                <a:solidFill>
-                  <a:srgbClr val="7D7D7D"/>
-                </a:solidFill>
-                <a:latin typeface="Pretendard"/>
-                <a:ea typeface="Pretendard"/>
-                <a:cs typeface="Pretendard"/>
-              </a:rPr>
-              <a:t>뜨는 데 30초~1분 — SERVER STARTED 전에 CLI 로 붙으면 연결 거부. depends_on 은 rest·minio</a:t>
-            </a:r>
-          </a:p>
-        </p:txBody>
-      </p:sp>
-      <p:sp>
-        <p:nvSpPr>
-          <p:cNvPr id="29" name="Rectangle 28"/>
+              <a:t>until … grep -q "SERVER STARTED" → Trino 준비 완료</a:t>
+            </a:r>
+          </a:p>
+        </p:txBody>
+      </p:sp>
+      <p:sp>
+        <p:nvSpPr>
+          <p:cNvPr id="28" name="Rectangle 27"/>
           <p:cNvSpPr/>
           <p:nvPr/>
         </p:nvSpPr>
         <p:spPr>
           <a:xfrm>
-            <a:off x="1143000" y="8058150"/>
-            <a:ext cx="16002000" cy="9525"/>
-          </a:xfrm>
-          <a:prstGeom prst="rect">
-            <a:avLst/>
-          </a:prstGeom>
-          <a:solidFill>
-            <a:srgbClr val="DCE1E8"/>
+            <a:off x="1143000" y="6019800"/>
+            <a:ext cx="1335881" cy="571500"/>
+          </a:xfrm>
+          <a:prstGeom prst="rect">
+            <a:avLst/>
+          </a:prstGeom>
+          <a:solidFill>
+            <a:srgbClr val="0D2B5E"/>
           </a:solidFill>
           <a:ln>
             <a:noFill/>
@@ -9057,7 +9166,192 @@
       </p:sp>
       <p:sp>
         <p:nvSpPr>
-          <p:cNvPr id="30" name="TextBox 29"/>
+          <p:cNvPr id="29" name="TextBox 28"/>
+          <p:cNvSpPr txBox="1"/>
+          <p:nvPr/>
+        </p:nvSpPr>
+        <p:spPr>
+          <a:xfrm>
+            <a:off x="1143000" y="6019800"/>
+            <a:ext cx="1335881" cy="571500"/>
+          </a:xfrm>
+          <a:prstGeom prst="rect">
+            <a:avLst/>
+          </a:prstGeom>
+          <a:noFill/>
+        </p:spPr>
+        <p:txBody>
+          <a:bodyPr wrap="square" lIns="0" rIns="0" tIns="0" bIns="0" anchor="ctr">
+            <a:spAutoFit/>
+          </a:bodyPr>
+          <a:lstStyle/>
+          <a:p>
+            <a:pPr algn="ctr">
+              <a:lnSpc>
+                <a:spcPct val="100000"/>
+              </a:lnSpc>
+            </a:pPr>
+            <a:r>
+              <a:rPr sz="1800" b="1">
+                <a:solidFill>
+                  <a:srgbClr val="FFFFFF"/>
+                </a:solidFill>
+                <a:latin typeface="Pretendard"/>
+                <a:ea typeface="Pretendard"/>
+                <a:cs typeface="Pretendard"/>
+              </a:rPr>
+              <a:t>확인</a:t>
+            </a:r>
+          </a:p>
+        </p:txBody>
+      </p:sp>
+      <p:sp>
+        <p:nvSpPr>
+          <p:cNvPr id="30" name="Rectangle 29"/>
+          <p:cNvSpPr/>
+          <p:nvPr/>
+        </p:nvSpPr>
+        <p:spPr>
+          <a:xfrm>
+            <a:off x="2478881" y="6019800"/>
+            <a:ext cx="14666119" cy="571500"/>
+          </a:xfrm>
+          <a:prstGeom prst="rect">
+            <a:avLst/>
+          </a:prstGeom>
+          <a:solidFill>
+            <a:srgbClr val="FAFBFD"/>
+          </a:solidFill>
+          <a:ln w="9525">
+            <a:solidFill>
+              <a:srgbClr val="DCE1E8"/>
+            </a:solidFill>
+          </a:ln>
+          <a:effectLst/>
+        </p:spPr>
+        <p:txBody>
+          <a:bodyPr rtlCol="0" anchor="ctr" wrap="square"/>
+          <a:lstStyle/>
+          <a:p>
+            <a:pPr algn="ctr"/>
+          </a:p>
+        </p:txBody>
+      </p:sp>
+      <p:sp>
+        <p:nvSpPr>
+          <p:cNvPr id="31" name="TextBox 30"/>
+          <p:cNvSpPr txBox="1"/>
+          <p:nvPr/>
+        </p:nvSpPr>
+        <p:spPr>
+          <a:xfrm>
+            <a:off x="2631281" y="6019800"/>
+            <a:ext cx="14361319" cy="571500"/>
+          </a:xfrm>
+          <a:prstGeom prst="rect">
+            <a:avLst/>
+          </a:prstGeom>
+          <a:noFill/>
+        </p:spPr>
+        <p:txBody>
+          <a:bodyPr wrap="square" lIns="0" rIns="0" tIns="0" bIns="0" anchor="ctr">
+            <a:spAutoFit/>
+          </a:bodyPr>
+          <a:lstStyle/>
+          <a:p>
+            <a:pPr algn="l">
+              <a:lnSpc>
+                <a:spcPct val="115000"/>
+              </a:lnSpc>
+            </a:pPr>
+            <a:r>
+              <a:rPr sz="1800" b="0">
+                <a:solidFill>
+                  <a:srgbClr val="3D3D3D"/>
+                </a:solidFill>
+                <a:latin typeface="Pretendard"/>
+                <a:ea typeface="Pretendard"/>
+                <a:cs typeface="Pretendard"/>
+              </a:rPr>
+              <a:t>ps 에 다섯 Up · trino (healthy)</a:t>
+            </a:r>
+          </a:p>
+        </p:txBody>
+      </p:sp>
+      <p:sp>
+        <p:nvSpPr>
+          <p:cNvPr id="32" name="TextBox 31"/>
+          <p:cNvSpPr txBox="1"/>
+          <p:nvPr/>
+        </p:nvSpPr>
+        <p:spPr>
+          <a:xfrm>
+            <a:off x="1143000" y="7620000"/>
+            <a:ext cx="16002000" cy="342900"/>
+          </a:xfrm>
+          <a:prstGeom prst="rect">
+            <a:avLst/>
+          </a:prstGeom>
+          <a:noFill/>
+        </p:spPr>
+        <p:txBody>
+          <a:bodyPr wrap="square" lIns="0" rIns="0" tIns="0" bIns="0" anchor="t">
+            <a:spAutoFit/>
+          </a:bodyPr>
+          <a:lstStyle/>
+          <a:p>
+            <a:pPr algn="l">
+              <a:lnSpc>
+                <a:spcPct val="100000"/>
+              </a:lnSpc>
+            </a:pPr>
+            <a:r>
+              <a:rPr sz="1875" b="1">
+                <a:solidFill>
+                  <a:srgbClr val="7D7D7D"/>
+                </a:solidFill>
+                <a:latin typeface="Pretendard"/>
+                <a:ea typeface="Pretendard"/>
+                <a:cs typeface="Pretendard"/>
+              </a:rPr>
+              <a:t>실측 18초 · 43초 — SERVER STARTED 전에 붙으면 연결 거부. 그래서 until 줄로 기다린다</a:t>
+            </a:r>
+          </a:p>
+        </p:txBody>
+      </p:sp>
+      <p:sp>
+        <p:nvSpPr>
+          <p:cNvPr id="33" name="Rectangle 32"/>
+          <p:cNvSpPr/>
+          <p:nvPr/>
+        </p:nvSpPr>
+        <p:spPr>
+          <a:xfrm>
+            <a:off x="1143000" y="8058150"/>
+            <a:ext cx="16002000" cy="9525"/>
+          </a:xfrm>
+          <a:prstGeom prst="rect">
+            <a:avLst/>
+          </a:prstGeom>
+          <a:solidFill>
+            <a:srgbClr val="DCE1E8"/>
+          </a:solidFill>
+          <a:ln>
+            <a:noFill/>
+          </a:ln>
+          <a:effectLst/>
+        </p:spPr>
+        <p:txBody>
+          <a:bodyPr rtlCol="0" anchor="ctr" wrap="square"/>
+          <a:lstStyle/>
+          <a:p>
+            <a:pPr algn="ctr"/>
+          </a:p>
+        </p:txBody>
+      </p:sp>
+      <p:sp>
+        <p:nvSpPr>
+          <p:cNvPr id="34" name="TextBox 33"/>
           <p:cNvSpPr txBox="1"/>
           <p:nvPr/>
         </p:nvSpPr>
@@ -9098,7 +9392,7 @@
       </p:sp>
       <p:sp>
         <p:nvSpPr>
-          <p:cNvPr id="31" name="TextBox 30"/>
+          <p:cNvPr id="35" name="TextBox 34"/>
           <p:cNvSpPr txBox="1"/>
           <p:nvPr/>
         </p:nvSpPr>
@@ -9157,7 +9451,7 @@
       <p:grpSpPr/>
       <p:sp>
         <p:nvSpPr>
-          <p:cNvPr id="2" name="Oval 1"/>
+          <p:cNvPr id="2" name="deckgen:decor"/>
           <p:cNvSpPr/>
           <p:nvPr/>
         </p:nvSpPr>
@@ -9187,7 +9481,7 @@
       </p:sp>
       <p:sp>
         <p:nvSpPr>
-          <p:cNvPr id="3" name="Oval 2"/>
+          <p:cNvPr id="3" name="deckgen:decor"/>
           <p:cNvSpPr/>
           <p:nvPr/>
         </p:nvSpPr>
@@ -9217,7 +9511,7 @@
       </p:sp>
       <p:sp>
         <p:nvSpPr>
-          <p:cNvPr id="4" name="Oval 3"/>
+          <p:cNvPr id="4" name="deckgen:decor"/>
           <p:cNvSpPr/>
           <p:nvPr/>
         </p:nvSpPr>
@@ -9498,7 +9792,7 @@
                 <a:ea typeface="Pretendard"/>
                 <a:cs typeface="Pretendard"/>
               </a:rPr>
-              <a:t>컨테이너 안에 파일이 보인다</a:t>
+              <a:t>컨테이너 안에 파일이 하나 보인다</a:t>
             </a:r>
           </a:p>
         </p:txBody>
@@ -9539,7 +9833,7 @@
                 <a:ea typeface="Pretendard"/>
                 <a:cs typeface="Pretendard"/>
               </a:rPr>
-              <a:t>exec trino ls -la /etc/trino/catalog/ · cat iceberg.properties</a:t>
+              <a:t>exec trino ls -la /etc/trino/catalog/ → iceberg.properties</a:t>
             </a:r>
           </a:p>
         </p:txBody>
@@ -9685,7 +9979,7 @@
                 <a:ea typeface="Pretendard"/>
                 <a:cs typeface="Pretendard"/>
               </a:rPr>
-              <a:t>로그에 카탈로그 오류가 없다</a:t>
+              <a:t>카탈로그가 올라갔다</a:t>
             </a:r>
           </a:p>
         </p:txBody>
@@ -9726,7 +10020,7 @@
                 <a:ea typeface="Pretendard"/>
                 <a:cs typeface="Pretendard"/>
               </a:rPr>
-              <a:t>logs trino | grep -i -E "catalog|error" | tail -n 10</a:t>
+              <a:t>grep -E "Added catalog|has been replaced" → Added 한 줄</a:t>
             </a:r>
           </a:p>
         </p:txBody>
@@ -9913,7 +10207,7 @@
                 <a:ea typeface="Pretendard"/>
                 <a:cs typeface="Pretendard"/>
               </a:rPr>
-              <a:t>exec -it trino trino → SHOW CATALOGS · SHOW TABLES</a:t>
+              <a:t>SHOW CATALOGS → iceberg · system · SHOW TABLES → orders</a:t>
             </a:r>
           </a:p>
         </p:txBody>
@@ -10100,7 +10394,7 @@
                 <a:ea typeface="Pretendard"/>
                 <a:cs typeface="Pretendard"/>
               </a:rPr>
-              <a:t>4-2 에서 ADD COLUMN 한 열 — 스키마 변경이 카탈로그로 전달됐다</a:t>
+              <a:t>다섯 컬럼 — 4-2 에서 ADD COLUMN 한 열이 카탈로그로 전달됐다</a:t>
             </a:r>
           </a:p>
         </p:txBody>
@@ -10371,7 +10665,7 @@
       <p:grpSpPr/>
       <p:sp>
         <p:nvSpPr>
-          <p:cNvPr id="2" name="Oval 1"/>
+          <p:cNvPr id="2" name="deckgen:decor"/>
           <p:cNvSpPr/>
           <p:nvPr/>
         </p:nvSpPr>
@@ -10401,7 +10695,7 @@
       </p:sp>
       <p:sp>
         <p:nvSpPr>
-          <p:cNvPr id="3" name="Oval 2"/>
+          <p:cNvPr id="3" name="deckgen:decor"/>
           <p:cNvSpPr/>
           <p:nvPr/>
         </p:nvSpPr>
@@ -10431,7 +10725,7 @@
       </p:sp>
       <p:sp>
         <p:nvSpPr>
-          <p:cNvPr id="4" name="Oval 3"/>
+          <p:cNvPr id="4" name="deckgen:decor"/>
           <p:cNvSpPr/>
           <p:nvPr/>
         </p:nvSpPr>
@@ -10648,7 +10942,7 @@
                 <a:ea typeface="Pretendard"/>
                 <a:cs typeface="Pretendard"/>
               </a:rPr>
-              <a:t>Trino CLI 에서</a:t>
+              <a:t>trino&gt; 에서</a:t>
             </a:r>
           </a:p>
         </p:txBody>
@@ -10895,7 +11189,7 @@
                 <a:ea typeface="Pretendard"/>
                 <a:cs typeface="Pretendard"/>
               </a:rPr>
-              <a:t>기대: cnt 6</a:t>
+              <a:t>실측: 6행 · cnt 6 · total 165000.0</a:t>
             </a:r>
           </a:p>
         </p:txBody>
@@ -10977,7 +11271,7 @@
                 <a:ea typeface="Pretendard"/>
                 <a:cs typeface="Pretendard"/>
               </a:rPr>
-              <a:t>새 터미널에서 같은 집계</a:t>
+              <a:t>새 터미널에서 cd ~/lakehouse 부터</a:t>
             </a:r>
           </a:p>
         </p:txBody>
@@ -11224,7 +11518,7 @@
                 <a:ea typeface="Pretendard"/>
                 <a:cs typeface="Pretendard"/>
               </a:rPr>
-              <a:t>기대: cnt 6 · total 이 Trino 와 정확히 같다</a:t>
+              <a:t>실측: 6 · 165000.0 — Trino 와 같다</a:t>
             </a:r>
           </a:p>
         </p:txBody>
@@ -11432,7 +11726,7 @@
       <p:grpSpPr/>
       <p:sp>
         <p:nvSpPr>
-          <p:cNvPr id="2" name="Oval 1"/>
+          <p:cNvPr id="2" name="deckgen:decor"/>
           <p:cNvSpPr/>
           <p:nvPr/>
         </p:nvSpPr>
@@ -11462,7 +11756,7 @@
       </p:sp>
       <p:sp>
         <p:nvSpPr>
-          <p:cNvPr id="3" name="Oval 2"/>
+          <p:cNvPr id="3" name="deckgen:decor"/>
           <p:cNvSpPr/>
           <p:nvPr/>
         </p:nvSpPr>
@@ -11492,7 +11786,7 @@
       </p:sp>
       <p:sp>
         <p:nvSpPr>
-          <p:cNvPr id="4" name="Oval 3"/>
+          <p:cNvPr id="4" name="deckgen:decor"/>
           <p:cNvSpPr/>
           <p:nvPr/>
         </p:nvSpPr>
@@ -11597,7 +11891,7 @@
                 <a:ea typeface="Pretendard"/>
                 <a:cs typeface="Pretendard"/>
               </a:rPr>
-              <a:t>s3.endpoint 를 localhost 로 써 보기</a:t>
+              <a:t>SERVER STARTED 전에 CLI 로 붙어 보기</a:t>
             </a:r>
           </a:p>
         </p:txBody>
@@ -11668,7 +11962,7 @@
                 <a:ea typeface="Pretendard"/>
                 <a:cs typeface="Pretendard"/>
               </a:rPr>
-              <a:t>설정 한 줄이 틀리면 어디서 어떻게 죽는지 본 뒤 고칩니다 — 로그를 읽는 습관</a:t>
+              <a:t>서버가 아직 부팅 중일 때 어떻게 죽는지 보고, until 줄이 왜 필요한지 확인합니다</a:t>
             </a:r>
           </a:p>
         </p:txBody>
@@ -11773,7 +12067,7 @@
                 <a:ea typeface="Pretendard"/>
                 <a:cs typeface="Pretendard"/>
               </a:rPr>
-              <a:t>1. 한 줄 바꾸기</a:t>
+              <a:t>1. 지우고 다시</a:t>
             </a:r>
           </a:p>
         </p:txBody>
@@ -11814,7 +12108,7 @@
                 <a:ea typeface="Pretendard"/>
                 <a:cs typeface="Pretendard"/>
               </a:rPr>
-              <a:t>s3.endpoint=</a:t>
+              <a:t>rm -sf trino</a:t>
             </a:r>
           </a:p>
           <a:p>
@@ -11832,7 +12126,7 @@
                 <a:ea typeface="Pretendard"/>
                 <a:cs typeface="Pretendard"/>
               </a:rPr>
-              <a:t>localhost:9000</a:t>
+              <a:t>→ up -d</a:t>
             </a:r>
           </a:p>
         </p:txBody>
@@ -11937,7 +12231,7 @@
                 <a:ea typeface="Pretendard"/>
                 <a:cs typeface="Pretendard"/>
               </a:rPr>
-              <a:t>2. 재시작</a:t>
+              <a:t>2. 곧바로 조회</a:t>
             </a:r>
           </a:p>
         </p:txBody>
@@ -11978,7 +12272,7 @@
                 <a:ea typeface="Pretendard"/>
                 <a:cs typeface="Pretendard"/>
               </a:rPr>
-              <a:t>docker compose</a:t>
+              <a:t>exec -it trino trino</a:t>
             </a:r>
           </a:p>
           <a:p>
@@ -11996,7 +12290,7 @@
                 <a:ea typeface="Pretendard"/>
                 <a:cs typeface="Pretendard"/>
               </a:rPr>
-              <a:t>restart trino</a:t>
+              <a:t>SHOW CATALOGS;</a:t>
             </a:r>
           </a:p>
         </p:txBody>
@@ -12101,7 +12395,7 @@
                 <a:ea typeface="Pretendard"/>
                 <a:cs typeface="Pretendard"/>
               </a:rPr>
-              <a:t>3. 조회</a:t>
+              <a:t>3. 오류 읽기</a:t>
             </a:r>
           </a:p>
         </p:txBody>
@@ -12142,7 +12436,7 @@
                 <a:ea typeface="Pretendard"/>
                 <a:cs typeface="Pretendard"/>
               </a:rPr>
-              <a:t>SELECT count(*)</a:t>
+              <a:t>Failed to connect</a:t>
             </a:r>
           </a:p>
           <a:p>
@@ -12160,7 +12454,7 @@
                 <a:ea typeface="Pretendard"/>
                 <a:cs typeface="Pretendard"/>
               </a:rPr>
-              <a:t>FROM …orders</a:t>
+              <a:t>localhost … :8080</a:t>
             </a:r>
           </a:p>
         </p:txBody>
@@ -12265,7 +12559,7 @@
                 <a:ea typeface="Pretendard"/>
                 <a:cs typeface="Pretendard"/>
               </a:rPr>
-              <a:t>4. 오류 읽기</a:t>
+              <a:t>4. 이유</a:t>
             </a:r>
           </a:p>
         </p:txBody>
@@ -12306,7 +12600,7 @@
                 <a:ea typeface="Pretendard"/>
                 <a:cs typeface="Pretendard"/>
               </a:rPr>
-              <a:t>Unable to execute</a:t>
+              <a:t>서버가 아직</a:t>
             </a:r>
           </a:p>
           <a:p>
@@ -12324,7 +12618,7 @@
                 <a:ea typeface="Pretendard"/>
                 <a:cs typeface="Pretendard"/>
               </a:rPr>
-              <a:t>HTTP request</a:t>
+              <a:t>부팅 중</a:t>
             </a:r>
           </a:p>
         </p:txBody>
@@ -12429,7 +12723,7 @@
                 <a:ea typeface="Pretendard"/>
                 <a:cs typeface="Pretendard"/>
               </a:rPr>
-              <a:t>5. 되돌리기</a:t>
+              <a:t>5. 기다린 뒤</a:t>
             </a:r>
           </a:p>
         </p:txBody>
@@ -12470,7 +12764,7 @@
                 <a:ea typeface="Pretendard"/>
                 <a:cs typeface="Pretendard"/>
               </a:rPr>
-              <a:t>minio:9000</a:t>
+              <a:t>until 줄로</a:t>
             </a:r>
           </a:p>
           <a:p>
@@ -12488,7 +12782,7 @@
                 <a:ea typeface="Pretendard"/>
                 <a:cs typeface="Pretendard"/>
               </a:rPr>
-              <a:t>restart 후 재조회</a:t>
+              <a:t>준비 완료 → 재조회</a:t>
             </a:r>
           </a:p>
         </p:txBody>
@@ -12625,7 +12919,7 @@
       <p:grpSpPr/>
       <p:sp>
         <p:nvSpPr>
-          <p:cNvPr id="2" name="Oval 1"/>
+          <p:cNvPr id="2" name="deckgen:decor"/>
           <p:cNvSpPr/>
           <p:nvPr/>
         </p:nvSpPr>
@@ -12655,7 +12949,7 @@
       </p:sp>
       <p:sp>
         <p:nvSpPr>
-          <p:cNvPr id="3" name="Oval 2"/>
+          <p:cNvPr id="3" name="deckgen:decor"/>
           <p:cNvSpPr/>
           <p:nvPr/>
         </p:nvSpPr>
@@ -12685,7 +12979,7 @@
       </p:sp>
       <p:sp>
         <p:nvSpPr>
-          <p:cNvPr id="4" name="Oval 3"/>
+          <p:cNvPr id="4" name="deckgen:decor"/>
           <p:cNvSpPr/>
           <p:nvPr/>
         </p:nvSpPr>
@@ -12833,12 +13127,12 @@
         </p:nvSpPr>
         <p:spPr>
           <a:xfrm>
-            <a:off x="1143000" y="2990850"/>
-            <a:ext cx="16002000" cy="819150"/>
+            <a:off x="1143000" y="2871788"/>
+            <a:ext cx="16002000" cy="676275"/>
           </a:xfrm>
           <a:prstGeom prst="roundRect">
             <a:avLst>
-              <a:gd name="adj" fmla="val 5813"/>
+              <a:gd name="adj" fmla="val 7042"/>
             </a:avLst>
           </a:prstGeom>
           <a:solidFill>
@@ -12867,7 +13161,7 @@
         </p:nvSpPr>
         <p:spPr>
           <a:xfrm>
-            <a:off x="1390650" y="3133725"/>
+            <a:off x="1390650" y="2943225"/>
             <a:ext cx="533400" cy="533400"/>
           </a:xfrm>
           <a:prstGeom prst="ellipse">
@@ -12897,7 +13191,7 @@
         </p:nvSpPr>
         <p:spPr>
           <a:xfrm>
-            <a:off x="1390650" y="3257550"/>
+            <a:off x="1390650" y="3067050"/>
             <a:ext cx="533400" cy="323850"/>
           </a:xfrm>
           <a:prstGeom prst="rect">
@@ -12938,8 +13232,8 @@
         </p:nvSpPr>
         <p:spPr>
           <a:xfrm>
-            <a:off x="2190750" y="2990850"/>
-            <a:ext cx="14573250" cy="819150"/>
+            <a:off x="2190750" y="2871788"/>
+            <a:ext cx="14573250" cy="676275"/>
           </a:xfrm>
           <a:prstGeom prst="rect">
             <a:avLst/>
@@ -12958,7 +13252,7 @@
               </a:lnSpc>
             </a:pPr>
             <a:r>
-              <a:rPr sz="2325" b="1">
+              <a:rPr sz="2100" b="1">
                 <a:solidFill>
                   <a:srgbClr val="0D2B5E"/>
                 </a:solidFill>
@@ -12966,7 +13260,7 @@
                 <a:ea typeface="Pretendard"/>
                 <a:cs typeface="Pretendard"/>
               </a:rPr>
-              <a:t>docker compose logs -f trino 에 SERVER STARTED 가 찍혔다</a:t>
+              <a:t>「Trino 준비 완료」 뒤 ps 에 다섯 Up · trino (healthy)</a:t>
             </a:r>
           </a:p>
         </p:txBody>
@@ -12979,12 +13273,12 @@
         </p:nvSpPr>
         <p:spPr>
           <a:xfrm>
-            <a:off x="1143000" y="3981450"/>
-            <a:ext cx="16002000" cy="819150"/>
+            <a:off x="1143000" y="3662362"/>
+            <a:ext cx="16002000" cy="676275"/>
           </a:xfrm>
           <a:prstGeom prst="roundRect">
             <a:avLst>
-              <a:gd name="adj" fmla="val 5813"/>
+              <a:gd name="adj" fmla="val 7042"/>
             </a:avLst>
           </a:prstGeom>
           <a:solidFill>
@@ -13013,7 +13307,7 @@
         </p:nvSpPr>
         <p:spPr>
           <a:xfrm>
-            <a:off x="1390650" y="4124325"/>
+            <a:off x="1390650" y="3733800"/>
             <a:ext cx="533400" cy="533400"/>
           </a:xfrm>
           <a:prstGeom prst="ellipse">
@@ -13043,7 +13337,7 @@
         </p:nvSpPr>
         <p:spPr>
           <a:xfrm>
-            <a:off x="1390650" y="4248150"/>
+            <a:off x="1390650" y="3857625"/>
             <a:ext cx="533400" cy="323850"/>
           </a:xfrm>
           <a:prstGeom prst="rect">
@@ -13084,8 +13378,8 @@
         </p:nvSpPr>
         <p:spPr>
           <a:xfrm>
-            <a:off x="2190750" y="3981450"/>
-            <a:ext cx="14573250" cy="819150"/>
+            <a:off x="2190750" y="3662362"/>
+            <a:ext cx="14573250" cy="676275"/>
           </a:xfrm>
           <a:prstGeom prst="rect">
             <a:avLst/>
@@ -13104,7 +13398,7 @@
               </a:lnSpc>
             </a:pPr>
             <a:r>
-              <a:rPr sz="2325" b="1">
+              <a:rPr sz="2100" b="1">
                 <a:solidFill>
                   <a:srgbClr val="0D2B5E"/>
                 </a:solidFill>
@@ -13112,7 +13406,7 @@
                 <a:ea typeface="Pretendard"/>
                 <a:cs typeface="Pretendard"/>
               </a:rPr>
-              <a:t>SHOW CATALOGS 에 iceberg, SHOW TABLES 에 orders 가 보인다</a:t>
+              <a:t>logs 에 Added catalog iceberg 한 줄, 바뀐 이름 경고 없음</a:t>
             </a:r>
           </a:p>
         </p:txBody>
@@ -13125,12 +13419,12 @@
         </p:nvSpPr>
         <p:spPr>
           <a:xfrm>
-            <a:off x="1143000" y="4972050"/>
-            <a:ext cx="16002000" cy="819150"/>
+            <a:off x="1143000" y="4452938"/>
+            <a:ext cx="16002000" cy="676275"/>
           </a:xfrm>
           <a:prstGeom prst="roundRect">
             <a:avLst>
-              <a:gd name="adj" fmla="val 5813"/>
+              <a:gd name="adj" fmla="val 7042"/>
             </a:avLst>
           </a:prstGeom>
           <a:solidFill>
@@ -13159,7 +13453,7 @@
         </p:nvSpPr>
         <p:spPr>
           <a:xfrm>
-            <a:off x="1390650" y="5114925"/>
+            <a:off x="1390650" y="4524375"/>
             <a:ext cx="533400" cy="533400"/>
           </a:xfrm>
           <a:prstGeom prst="ellipse">
@@ -13189,7 +13483,7 @@
         </p:nvSpPr>
         <p:spPr>
           <a:xfrm>
-            <a:off x="1390650" y="5238750"/>
+            <a:off x="1390650" y="4648200"/>
             <a:ext cx="533400" cy="323850"/>
           </a:xfrm>
           <a:prstGeom prst="rect">
@@ -13230,8 +13524,8 @@
         </p:nvSpPr>
         <p:spPr>
           <a:xfrm>
-            <a:off x="2190750" y="4972050"/>
-            <a:ext cx="14573250" cy="819150"/>
+            <a:off x="2190750" y="4452938"/>
+            <a:ext cx="14573250" cy="676275"/>
           </a:xfrm>
           <a:prstGeom prst="rect">
             <a:avLst/>
@@ -13250,7 +13544,7 @@
               </a:lnSpc>
             </a:pPr>
             <a:r>
-              <a:rPr sz="2325" b="1">
+              <a:rPr sz="2100" b="1">
                 <a:solidFill>
                   <a:srgbClr val="0D2B5E"/>
                 </a:solidFill>
@@ -13258,7 +13552,7 @@
                 <a:ea typeface="Pretendard"/>
                 <a:cs typeface="Pretendard"/>
               </a:rPr>
-              <a:t>DESCRIBE iceberg.lakehouse.orders 에 channel 열이 있다</a:t>
+              <a:t>SHOW CATALOGS 에 iceberg · system, SHOW TABLES 에 orders</a:t>
             </a:r>
           </a:p>
         </p:txBody>
@@ -13271,12 +13565,12 @@
         </p:nvSpPr>
         <p:spPr>
           <a:xfrm>
-            <a:off x="1143000" y="5962650"/>
-            <a:ext cx="16002000" cy="819150"/>
+            <a:off x="1143000" y="5243512"/>
+            <a:ext cx="16002000" cy="676275"/>
           </a:xfrm>
           <a:prstGeom prst="roundRect">
             <a:avLst>
-              <a:gd name="adj" fmla="val 5813"/>
+              <a:gd name="adj" fmla="val 7042"/>
             </a:avLst>
           </a:prstGeom>
           <a:solidFill>
@@ -13305,7 +13599,7 @@
         </p:nvSpPr>
         <p:spPr>
           <a:xfrm>
-            <a:off x="1390650" y="6105525"/>
+            <a:off x="1390650" y="5314950"/>
             <a:ext cx="533400" cy="533400"/>
           </a:xfrm>
           <a:prstGeom prst="ellipse">
@@ -13335,7 +13629,7 @@
         </p:nvSpPr>
         <p:spPr>
           <a:xfrm>
-            <a:off x="1390650" y="6229350"/>
+            <a:off x="1390650" y="5438775"/>
             <a:ext cx="533400" cy="323850"/>
           </a:xfrm>
           <a:prstGeom prst="rect">
@@ -13376,8 +13670,8 @@
         </p:nvSpPr>
         <p:spPr>
           <a:xfrm>
-            <a:off x="2190750" y="5962650"/>
-            <a:ext cx="14573250" cy="819150"/>
+            <a:off x="2190750" y="5243512"/>
+            <a:ext cx="14573250" cy="676275"/>
           </a:xfrm>
           <a:prstGeom prst="rect">
             <a:avLst/>
@@ -13396,7 +13690,7 @@
               </a:lnSpc>
             </a:pPr>
             <a:r>
-              <a:rPr sz="2325" b="1">
+              <a:rPr sz="2100" b="1">
                 <a:solidFill>
                   <a:srgbClr val="0D2B5E"/>
                 </a:solidFill>
@@ -13404,7 +13698,7 @@
                 <a:ea typeface="Pretendard"/>
                 <a:cs typeface="Pretendard"/>
               </a:rPr>
-              <a:t>Trino 와 Spark 의 cnt(6)·total 이 정확히 같다</a:t>
+              <a:t>DESCRIBE 에 channel varchar 까지 다섯 컬럼</a:t>
             </a:r>
           </a:p>
         </p:txBody>
@@ -13417,12 +13711,12 @@
         </p:nvSpPr>
         <p:spPr>
           <a:xfrm>
-            <a:off x="1143000" y="6953250"/>
-            <a:ext cx="16002000" cy="819150"/>
+            <a:off x="1143000" y="6034088"/>
+            <a:ext cx="16002000" cy="676275"/>
           </a:xfrm>
           <a:prstGeom prst="roundRect">
             <a:avLst>
-              <a:gd name="adj" fmla="val 5813"/>
+              <a:gd name="adj" fmla="val 7042"/>
             </a:avLst>
           </a:prstGeom>
           <a:solidFill>
@@ -13451,7 +13745,7 @@
         </p:nvSpPr>
         <p:spPr>
           <a:xfrm>
-            <a:off x="1390650" y="7096125"/>
+            <a:off x="1390650" y="6105525"/>
             <a:ext cx="533400" cy="533400"/>
           </a:xfrm>
           <a:prstGeom prst="ellipse">
@@ -13481,7 +13775,7 @@
         </p:nvSpPr>
         <p:spPr>
           <a:xfrm>
-            <a:off x="1390650" y="7219950"/>
+            <a:off x="1390650" y="6229350"/>
             <a:ext cx="533400" cy="323850"/>
           </a:xfrm>
           <a:prstGeom prst="rect">
@@ -13522,8 +13816,8 @@
         </p:nvSpPr>
         <p:spPr>
           <a:xfrm>
-            <a:off x="2190750" y="6953250"/>
-            <a:ext cx="14573250" cy="819150"/>
+            <a:off x="2190750" y="6034088"/>
+            <a:ext cx="14573250" cy="676275"/>
           </a:xfrm>
           <a:prstGeom prst="rect">
             <a:avLst/>
@@ -13542,7 +13836,7 @@
               </a:lnSpc>
             </a:pPr>
             <a:r>
-              <a:rPr sz="2325" b="1">
+              <a:rPr sz="2100" b="1">
                 <a:solidFill>
                   <a:srgbClr val="0D2B5E"/>
                 </a:solidFill>
@@ -13550,14 +13844,89 @@
                 <a:ea typeface="Pretendard"/>
                 <a:cs typeface="Pretendard"/>
               </a:rPr>
-              <a:t>localhost 로 틀린 endpoint 를 되돌린 뒤 다시 조회된다</a:t>
-            </a:r>
-          </a:p>
-        </p:txBody>
-      </p:sp>
-      <p:sp>
-        <p:nvSpPr>
-          <p:cNvPr id="28" name="Rectangle 27"/>
+              <a:t>Trino 와 Spark 모두 6 · 165000.0 — 같은 실체</a:t>
+            </a:r>
+          </a:p>
+        </p:txBody>
+      </p:sp>
+      <p:sp>
+        <p:nvSpPr>
+          <p:cNvPr id="28" name="Rounded Rectangle 27"/>
+          <p:cNvSpPr/>
+          <p:nvPr/>
+        </p:nvSpPr>
+        <p:spPr>
+          <a:xfrm>
+            <a:off x="1143000" y="6953250"/>
+            <a:ext cx="16002000" cy="876300"/>
+          </a:xfrm>
+          <a:prstGeom prst="roundRect">
+            <a:avLst>
+              <a:gd name="adj" fmla="val 5434"/>
+            </a:avLst>
+          </a:prstGeom>
+          <a:solidFill>
+            <a:srgbClr val="EDF3FD"/>
+          </a:solidFill>
+          <a:ln w="9525">
+            <a:solidFill>
+              <a:srgbClr val="BFD3F5"/>
+            </a:solidFill>
+          </a:ln>
+          <a:effectLst/>
+        </p:spPr>
+        <p:txBody>
+          <a:bodyPr rtlCol="0" anchor="ctr" wrap="square"/>
+          <a:lstStyle/>
+          <a:p>
+            <a:pPr algn="ctr"/>
+          </a:p>
+        </p:txBody>
+      </p:sp>
+      <p:sp>
+        <p:nvSpPr>
+          <p:cNvPr id="29" name="TextBox 28"/>
+          <p:cNvSpPr txBox="1"/>
+          <p:nvPr/>
+        </p:nvSpPr>
+        <p:spPr>
+          <a:xfrm>
+            <a:off x="1143000" y="7200900"/>
+            <a:ext cx="16002000" cy="438150"/>
+          </a:xfrm>
+          <a:prstGeom prst="rect">
+            <a:avLst/>
+          </a:prstGeom>
+          <a:noFill/>
+        </p:spPr>
+        <p:txBody>
+          <a:bodyPr wrap="square" lIns="0" rIns="0" tIns="0" bIns="0" anchor="t">
+            <a:spAutoFit/>
+          </a:bodyPr>
+          <a:lstStyle/>
+          <a:p>
+            <a:pPr algn="ctr">
+              <a:lnSpc>
+                <a:spcPct val="100000"/>
+              </a:lnSpc>
+            </a:pPr>
+            <a:r>
+              <a:rPr sz="2475" b="1">
+                <a:solidFill>
+                  <a:srgbClr val="0D2B5E"/>
+                </a:solidFill>
+                <a:latin typeface="Pretendard"/>
+                <a:ea typeface="Pretendard"/>
+                <a:cs typeface="Pretendard"/>
+              </a:rPr>
+              <a:t>주의: s3.endpoint 를 localhost 로 쓰면 SELECT 가 136초 멈춘다 — minio:9000</a:t>
+            </a:r>
+          </a:p>
+        </p:txBody>
+      </p:sp>
+      <p:sp>
+        <p:nvSpPr>
+          <p:cNvPr id="30" name="Rectangle 29"/>
           <p:cNvSpPr/>
           <p:nvPr/>
         </p:nvSpPr>
@@ -13587,7 +13956,7 @@
       </p:sp>
       <p:sp>
         <p:nvSpPr>
-          <p:cNvPr id="29" name="TextBox 28"/>
+          <p:cNvPr id="31" name="TextBox 30"/>
           <p:cNvSpPr txBox="1"/>
           <p:nvPr/>
         </p:nvSpPr>
@@ -13628,7 +13997,7 @@
       </p:sp>
       <p:sp>
         <p:nvSpPr>
-          <p:cNvPr id="30" name="TextBox 29"/>
+          <p:cNvPr id="32" name="TextBox 31"/>
           <p:cNvSpPr txBox="1"/>
           <p:nvPr/>
         </p:nvSpPr>
